--- a/docs/user-manual/05-procurement.pptx
+++ b/docs/user-manual/05-procurement.pptx
@@ -12,6 +12,7 @@
     <p:sldId id="260" r:id="rId11"/>
     <p:sldId id="261" r:id="rId12"/>
     <p:sldId id="262" r:id="rId13"/>
+    <p:sldId id="263" r:id="rId14"/>
   </p:sldIdLst>
   <p:sldSz cx="12188952" cy="6858000" type="screen4x3"/>
   <p:notesSz cx="6858000" cy="9144000"/>
@@ -3414,7 +3415,7 @@
                   <a:srgbClr val="B0C8E8"/>
                 </a:solidFill>
               </a:rPr>
-              <a:t>Vendor management · Quote collection · Adjudication</a:t>
+              <a:t>Vendor management · Quote collection · Adjudication · Early sourcing</a:t>
             </a:r>
           </a:p>
         </p:txBody>
@@ -3490,7 +3491,7 @@
                   <a:srgbClr val="8AB4D8"/>
                 </a:solidFill>
               </a:rPr>
-              <a:t>Key responsibility:  </a:t>
+              <a:t>Early sourcing:  </a:t>
             </a:r>
             <a:r>
               <a:rPr sz="1100">
@@ -3498,7 +3499,7 @@
                   <a:srgbClr val="D0E3F2"/>
                 </a:solidFill>
               </a:rPr>
-              <a:t>Vendor selection and order execution</a:t>
+              <a:t>Incoming PRs view — start at pending_finance</a:t>
             </a:r>
           </a:p>
         </p:txBody>
@@ -3532,7 +3533,7 @@
                   <a:srgbClr val="8AB4D8"/>
                 </a:solidFill>
               </a:rPr>
-              <a:t>Version:  </a:t>
+              <a:t>Key responsibility:  </a:t>
             </a:r>
             <a:r>
               <a:rPr sz="1100">
@@ -3540,7 +3541,7 @@
                   <a:srgbClr val="D0E3F2"/>
                 </a:solidFill>
               </a:rPr>
-              <a:t>1.0</a:t>
+              <a:t>Vendor selection and order execution</a:t>
             </a:r>
           </a:p>
         </p:txBody>
@@ -3707,6 +3708,21 @@
                   <a:srgbClr val="111111"/>
                 </a:solidFill>
               </a:rPr>
+              <a:t>Monitor Incoming PRs — read-only view of PRs at pending_finance / pending_md</a:t>
+            </a:r>
+          </a:p>
+          <a:p>
+            <a:pPr>
+              <a:spcBef>
+                <a:spcPts val="300"/>
+              </a:spcBef>
+            </a:pPr>
+            <a:r>
+              <a:rPr sz="1300">
+                <a:solidFill>
+                  <a:srgbClr val="111111"/>
+                </a:solidFill>
+              </a:rPr>
               <a:t>View every Purchase Requisition across all departments</a:t>
             </a:r>
           </a:p>
@@ -3912,7 +3928,7 @@
                   <a:srgbClr val="111111"/>
                 </a:solidFill>
               </a:rPr>
-              <a:t>Change amounts or items on an approved PR</a:t>
+              <a:t>Change amounts or items on any PR (Incoming PRs is read-only)</a:t>
             </a:r>
           </a:p>
           <a:p>
@@ -3943,6 +3959,21 @@
                 </a:solidFill>
               </a:rPr>
               <a:t>Your responsibilities:</a:t>
+            </a:r>
+          </a:p>
+          <a:p>
+            <a:pPr>
+              <a:spcBef>
+                <a:spcPts val="300"/>
+              </a:spcBef>
+            </a:pPr>
+            <a:r>
+              <a:rPr sz="1300">
+                <a:solidFill>
+                  <a:srgbClr val="111111"/>
+                </a:solidFill>
+              </a:rPr>
+              <a:t>Start sourcing early — monitor Incoming PRs from pending_finance</a:t>
             </a:r>
           </a:p>
           <a:p>
@@ -4185,7 +4216,7 @@
                 </a:solidFill>
                 <a:latin typeface="Consolas"/>
               </a:rPr>
-              <a:t>                                       ^                                |</a:t>
+              <a:t>                                        |                               |</a:t>
             </a:r>
           </a:p>
           <a:p>
@@ -4196,7 +4227,7 @@
                 </a:solidFill>
                 <a:latin typeface="Consolas"/>
               </a:rPr>
-              <a:t>                                       |                                v</a:t>
+              <a:t>                               INCOMING PRs VIEW                       v</a:t>
             </a:r>
           </a:p>
           <a:p>
@@ -4207,7 +4238,7 @@
                 </a:solidFill>
                 <a:latin typeface="Consolas"/>
               </a:rPr>
-              <a:t>                             YOU collect quotes here         YOU run adjudication,</a:t>
+              <a:t>                               (read-only) — you                  YOU run adjudication,</a:t>
             </a:r>
           </a:p>
           <a:p>
@@ -4218,7 +4249,7 @@
                 </a:solidFill>
                 <a:latin typeface="Consolas"/>
               </a:rPr>
-              <a:t>                             (often while pending_finance)    issue PO outside system</a:t>
+              <a:t>                               start collecting quotes             upload quotes,</a:t>
             </a:r>
           </a:p>
           <a:p>
@@ -4229,6 +4260,17 @@
                 </a:solidFill>
                 <a:latin typeface="Consolas"/>
               </a:rPr>
+              <a:t>                               from suppliers here                 issue PO outside system</a:t>
+            </a:r>
+          </a:p>
+          <a:p>
+            <a:r>
+              <a:rPr sz="1200">
+                <a:solidFill>
+                  <a:srgbClr val="111111"/>
+                </a:solidFill>
+                <a:latin typeface="Consolas"/>
+              </a:rPr>
               <a:t/>
             </a:r>
           </a:p>
@@ -4240,7 +4282,7 @@
                 </a:solidFill>
                 <a:latin typeface="Consolas"/>
               </a:rPr>
-              <a:t>  Optional sub-flow:</a:t>
+              <a:t>  Typical sub-flow:</a:t>
             </a:r>
           </a:p>
           <a:p>
@@ -4251,7 +4293,7 @@
                 </a:solidFill>
                 <a:latin typeface="Consolas"/>
               </a:rPr>
-              <a:t>    1. Collect quotes from suppliers (email / PDF).</a:t>
+              <a:t>    1. PR appears in Incoming PRs (With Finance or With MD).</a:t>
             </a:r>
           </a:p>
           <a:p>
@@ -4262,7 +4304,7 @@
                 </a:solidFill>
                 <a:latin typeface="Consolas"/>
               </a:rPr>
-              <a:t>    2. Upload quotes into the PR detail page.</a:t>
+              <a:t>    2. View PR details (read-only) to understand requirements.</a:t>
             </a:r>
           </a:p>
           <a:p>
@@ -4273,7 +4315,7 @@
                 </a:solidFill>
                 <a:latin typeface="Consolas"/>
               </a:rPr>
-              <a:t>    3. Run adjudication → select winning vendor → document reasoning.</a:t>
+              <a:t>    3. Contact vendors externally, collect written quotes.</a:t>
             </a:r>
           </a:p>
           <a:p>
@@ -4284,7 +4326,29 @@
                 </a:solidFill>
                 <a:latin typeface="Consolas"/>
               </a:rPr>
-              <a:t>    4. After MD approves, issue PO to winning vendor.</a:t>
+              <a:t>    4. Once PR is approved, upload quotes into the system.</a:t>
+            </a:r>
+          </a:p>
+          <a:p>
+            <a:r>
+              <a:rPr sz="1200">
+                <a:solidFill>
+                  <a:srgbClr val="111111"/>
+                </a:solidFill>
+                <a:latin typeface="Consolas"/>
+              </a:rPr>
+              <a:t>    5. Run adjudication → select winning vendor.</a:t>
+            </a:r>
+          </a:p>
+          <a:p>
+            <a:r>
+              <a:rPr sz="1200">
+                <a:solidFill>
+                  <a:srgbClr val="111111"/>
+                </a:solidFill>
+                <a:latin typeface="Consolas"/>
+              </a:rPr>
+              <a:t>    6. Issue PO to the winning vendor.</a:t>
             </a:r>
           </a:p>
         </p:txBody>
@@ -4379,20 +4443,54 @@
                   <a:srgbClr val="FFFFFF"/>
                 </a:solidFill>
               </a:rPr>
-              <a:t>Task: Collect &amp; Add Quotes</a:t>
-            </a:r>
-          </a:p>
-        </p:txBody>
-      </p:sp>
-      <p:sp>
-        <p:nvSpPr>
-          <p:cNvPr id="4" name="Oval 3"/>
+              <a:t>Task: Monitor Incoming PRs</a:t>
+            </a:r>
+          </a:p>
+        </p:txBody>
+      </p:sp>
+      <p:sp>
+        <p:nvSpPr>
+          <p:cNvPr id="4" name="TextBox 3"/>
+          <p:cNvSpPr txBox="1"/>
+          <p:nvPr/>
+        </p:nvSpPr>
+        <p:spPr>
+          <a:xfrm>
+            <a:off x="502920" y="1188720"/>
+            <a:ext cx="11183112" cy="320040"/>
+          </a:xfrm>
+          <a:prstGeom prst="rect">
+            <a:avLst/>
+          </a:prstGeom>
+          <a:noFill/>
+        </p:spPr>
+        <p:txBody>
+          <a:bodyPr wrap="square">
+            <a:spAutoFit/>
+          </a:bodyPr>
+          <a:lstStyle/>
+          <a:p>
+            <a:pPr algn="l"/>
+            <a:r>
+              <a:rPr sz="1200" b="0" i="1">
+                <a:solidFill>
+                  <a:srgbClr val="555555"/>
+                </a:solidFill>
+              </a:rPr>
+              <a:t>Incoming PRs is read-only. You cannot add quotes or take actions until the PR is approved.</a:t>
+            </a:r>
+          </a:p>
+        </p:txBody>
+      </p:sp>
+      <p:sp>
+        <p:nvSpPr>
+          <p:cNvPr id="5" name="Oval 4"/>
           <p:cNvSpPr/>
           <p:nvPr/>
         </p:nvSpPr>
         <p:spPr>
           <a:xfrm>
-            <a:off x="502920" y="1243584"/>
+            <a:off x="502920" y="1591056"/>
             <a:ext cx="411480" cy="411480"/>
           </a:xfrm>
           <a:prstGeom prst="ellipse">
@@ -4437,13 +4535,13 @@
       </p:sp>
       <p:sp>
         <p:nvSpPr>
-          <p:cNvPr id="5" name="TextBox 4"/>
+          <p:cNvPr id="6" name="TextBox 5"/>
           <p:cNvSpPr txBox="1"/>
           <p:nvPr/>
         </p:nvSpPr>
         <p:spPr>
           <a:xfrm>
-            <a:off x="1033272" y="1188720"/>
+            <a:off x="1033272" y="1536192"/>
             <a:ext cx="10634472" cy="566928"/>
           </a:xfrm>
           <a:prstGeom prst="rect">
@@ -4464,20 +4562,20 @@
                   <a:srgbClr val="111111"/>
                 </a:solidFill>
               </a:rPr>
-              <a:t>Sidebar → Procurement → Approved Requisitions (or watch PRs while still pending_finance).</a:t>
-            </a:r>
-          </a:p>
-        </p:txBody>
-      </p:sp>
-      <p:sp>
-        <p:nvSpPr>
-          <p:cNvPr id="6" name="Oval 5"/>
+              <a:t>Sidebar → Procurement → Incoming PRs  (or click 'PRs In Pipeline' on Dashboard).</a:t>
+            </a:r>
+          </a:p>
+        </p:txBody>
+      </p:sp>
+      <p:sp>
+        <p:nvSpPr>
+          <p:cNvPr id="7" name="Oval 6"/>
           <p:cNvSpPr/>
           <p:nvPr/>
         </p:nvSpPr>
         <p:spPr>
           <a:xfrm>
-            <a:off x="502920" y="1810512"/>
+            <a:off x="502920" y="2157984"/>
             <a:ext cx="411480" cy="411480"/>
           </a:xfrm>
           <a:prstGeom prst="ellipse">
@@ -4522,13 +4620,13 @@
       </p:sp>
       <p:sp>
         <p:nvSpPr>
-          <p:cNvPr id="7" name="TextBox 6"/>
+          <p:cNvPr id="8" name="TextBox 7"/>
           <p:cNvSpPr txBox="1"/>
           <p:nvPr/>
         </p:nvSpPr>
         <p:spPr>
           <a:xfrm>
-            <a:off x="1033272" y="1755648"/>
+            <a:off x="1033272" y="2103120"/>
             <a:ext cx="10634472" cy="566928"/>
           </a:xfrm>
           <a:prstGeom prst="rect">
@@ -4549,20 +4647,20 @@
                   <a:srgbClr val="111111"/>
                 </a:solidFill>
               </a:rPr>
-              <a:t>Open a PR. Scroll to the Quotes section.</a:t>
-            </a:r>
-          </a:p>
-        </p:txBody>
-      </p:sp>
-      <p:sp>
-        <p:nvSpPr>
-          <p:cNvPr id="8" name="Oval 7"/>
+              <a:t>The list shows all PRs at 'With Finance' (pending_finance) or 'With MD' (pending_md).</a:t>
+            </a:r>
+          </a:p>
+        </p:txBody>
+      </p:sp>
+      <p:sp>
+        <p:nvSpPr>
+          <p:cNvPr id="9" name="Oval 8"/>
           <p:cNvSpPr/>
           <p:nvPr/>
         </p:nvSpPr>
         <p:spPr>
           <a:xfrm>
-            <a:off x="502920" y="2377440"/>
+            <a:off x="502920" y="2724912"/>
             <a:ext cx="411480" cy="411480"/>
           </a:xfrm>
           <a:prstGeom prst="ellipse">
@@ -4607,13 +4705,13 @@
       </p:sp>
       <p:sp>
         <p:nvSpPr>
-          <p:cNvPr id="9" name="TextBox 8"/>
+          <p:cNvPr id="10" name="TextBox 9"/>
           <p:cNvSpPr txBox="1"/>
           <p:nvPr/>
         </p:nvSpPr>
         <p:spPr>
           <a:xfrm>
-            <a:off x="1033272" y="2322576"/>
+            <a:off x="1033272" y="2670048"/>
             <a:ext cx="10634472" cy="566928"/>
           </a:xfrm>
           <a:prstGeom prst="rect">
@@ -4634,20 +4732,20 @@
                   <a:srgbClr val="111111"/>
                 </a:solidFill>
               </a:rPr>
-              <a:t>Contact at least 3 suppliers and request written quotes (PDF, email, or letterhead).</a:t>
-            </a:r>
-          </a:p>
-        </p:txBody>
-      </p:sp>
-      <p:sp>
-        <p:nvSpPr>
-          <p:cNvPr id="10" name="Oval 9"/>
+              <a:t>Use the search bar to filter by PR number, title, or department.</a:t>
+            </a:r>
+          </a:p>
+        </p:txBody>
+      </p:sp>
+      <p:sp>
+        <p:nvSpPr>
+          <p:cNvPr id="11" name="Oval 10"/>
           <p:cNvSpPr/>
           <p:nvPr/>
         </p:nvSpPr>
         <p:spPr>
           <a:xfrm>
-            <a:off x="502920" y="2944368"/>
+            <a:off x="502920" y="3291840"/>
             <a:ext cx="411480" cy="411480"/>
           </a:xfrm>
           <a:prstGeom prst="ellipse">
@@ -4692,13 +4790,13 @@
       </p:sp>
       <p:sp>
         <p:nvSpPr>
-          <p:cNvPr id="11" name="TextBox 10"/>
+          <p:cNvPr id="12" name="TextBox 11"/>
           <p:cNvSpPr txBox="1"/>
           <p:nvPr/>
         </p:nvSpPr>
         <p:spPr>
           <a:xfrm>
-            <a:off x="1033272" y="2889504"/>
+            <a:off x="1033272" y="3236976"/>
             <a:ext cx="10634472" cy="566928"/>
           </a:xfrm>
           <a:prstGeom prst="rect">
@@ -4719,20 +4817,20 @@
                   <a:srgbClr val="111111"/>
                 </a:solidFill>
               </a:rPr>
-              <a:t>For each quote: click Add Quote, select the vendor from the master list, enter amount and currency, attach the PDF.</a:t>
-            </a:r>
-          </a:p>
-        </p:txBody>
-      </p:sp>
-      <p:sp>
-        <p:nvSpPr>
-          <p:cNvPr id="12" name="Oval 11"/>
+              <a:t>Click View on any row to open the PR in read-only detail mode.</a:t>
+            </a:r>
+          </a:p>
+        </p:txBody>
+      </p:sp>
+      <p:sp>
+        <p:nvSpPr>
+          <p:cNvPr id="13" name="Oval 12"/>
           <p:cNvSpPr/>
           <p:nvPr/>
         </p:nvSpPr>
         <p:spPr>
           <a:xfrm>
-            <a:off x="502920" y="3511296"/>
+            <a:off x="502920" y="3858768"/>
             <a:ext cx="411480" cy="411480"/>
           </a:xfrm>
           <a:prstGeom prst="ellipse">
@@ -4777,13 +4875,13 @@
       </p:sp>
       <p:sp>
         <p:nvSpPr>
-          <p:cNvPr id="13" name="TextBox 12"/>
+          <p:cNvPr id="14" name="TextBox 13"/>
           <p:cNvSpPr txBox="1"/>
           <p:nvPr/>
         </p:nvSpPr>
         <p:spPr>
           <a:xfrm>
-            <a:off x="1033272" y="3456432"/>
+            <a:off x="1033272" y="3803904"/>
             <a:ext cx="10634472" cy="566928"/>
           </a:xfrm>
           <a:prstGeom prst="rect">
@@ -4804,20 +4902,20 @@
                   <a:srgbClr val="111111"/>
                 </a:solidFill>
               </a:rPr>
-              <a:t>Repeat for each vendor quote.</a:t>
-            </a:r>
-          </a:p>
-        </p:txBody>
-      </p:sp>
-      <p:sp>
-        <p:nvSpPr>
-          <p:cNvPr id="14" name="Oval 13"/>
+              <a:t>Review items, quantities, required date, and any HOD notes.</a:t>
+            </a:r>
+          </a:p>
+        </p:txBody>
+      </p:sp>
+      <p:sp>
+        <p:nvSpPr>
+          <p:cNvPr id="15" name="Oval 14"/>
           <p:cNvSpPr/>
           <p:nvPr/>
         </p:nvSpPr>
         <p:spPr>
           <a:xfrm>
-            <a:off x="502920" y="4078224"/>
+            <a:off x="502920" y="4425696"/>
             <a:ext cx="411480" cy="411480"/>
           </a:xfrm>
           <a:prstGeom prst="ellipse">
@@ -4862,13 +4960,13 @@
       </p:sp>
       <p:sp>
         <p:nvSpPr>
-          <p:cNvPr id="15" name="TextBox 14"/>
+          <p:cNvPr id="16" name="TextBox 15"/>
           <p:cNvSpPr txBox="1"/>
           <p:nvPr/>
         </p:nvSpPr>
         <p:spPr>
           <a:xfrm>
-            <a:off x="1033272" y="4023360"/>
+            <a:off x="1033272" y="4370832"/>
             <a:ext cx="10634472" cy="566928"/>
           </a:xfrm>
           <a:prstGeom prst="rect">
@@ -4889,7 +4987,92 @@
                   <a:srgbClr val="111111"/>
                 </a:solidFill>
               </a:rPr>
-              <a:t>Once all quotes are in, proceed to adjudication.</a:t>
+              <a:t>Begin contacting vendors externally — collect informal quotes in parallel with the approval process.</a:t>
+            </a:r>
+          </a:p>
+        </p:txBody>
+      </p:sp>
+      <p:sp>
+        <p:nvSpPr>
+          <p:cNvPr id="17" name="Oval 16"/>
+          <p:cNvSpPr/>
+          <p:nvPr/>
+        </p:nvSpPr>
+        <p:spPr>
+          <a:xfrm>
+            <a:off x="502920" y="4992624"/>
+            <a:ext cx="411480" cy="411480"/>
+          </a:xfrm>
+          <a:prstGeom prst="ellipse">
+            <a:avLst/>
+          </a:prstGeom>
+          <a:solidFill>
+            <a:srgbClr val="0B4A8A"/>
+          </a:solidFill>
+          <a:ln>
+            <a:noFill/>
+          </a:ln>
+        </p:spPr>
+        <p:style>
+          <a:lnRef idx="1">
+            <a:schemeClr val="accent1"/>
+          </a:lnRef>
+          <a:fillRef idx="3">
+            <a:schemeClr val="accent1"/>
+          </a:fillRef>
+          <a:effectRef idx="2">
+            <a:schemeClr val="accent1"/>
+          </a:effectRef>
+          <a:fontRef idx="minor">
+            <a:schemeClr val="lt1"/>
+          </a:fontRef>
+        </p:style>
+        <p:txBody>
+          <a:bodyPr rtlCol="0" anchor="ctr"/>
+          <a:lstStyle/>
+          <a:p>
+            <a:pPr algn="ctr"/>
+            <a:r>
+              <a:rPr sz="1200" b="1">
+                <a:solidFill>
+                  <a:srgbClr val="FFFFFF"/>
+                </a:solidFill>
+              </a:rPr>
+              <a:t>7</a:t>
+            </a:r>
+          </a:p>
+        </p:txBody>
+      </p:sp>
+      <p:sp>
+        <p:nvSpPr>
+          <p:cNvPr id="18" name="TextBox 17"/>
+          <p:cNvSpPr txBox="1"/>
+          <p:nvPr/>
+        </p:nvSpPr>
+        <p:spPr>
+          <a:xfrm>
+            <a:off x="1033272" y="4937760"/>
+            <a:ext cx="10634472" cy="566928"/>
+          </a:xfrm>
+          <a:prstGeom prst="rect">
+            <a:avLst/>
+          </a:prstGeom>
+          <a:noFill/>
+        </p:spPr>
+        <p:txBody>
+          <a:bodyPr wrap="square">
+            <a:spAutoFit/>
+          </a:bodyPr>
+          <a:lstStyle/>
+          <a:p>
+            <a:pPr algn="l"/>
+            <a:r>
+              <a:rPr sz="1300" b="0" i="0">
+                <a:solidFill>
+                  <a:srgbClr val="111111"/>
+                </a:solidFill>
+              </a:rPr>
+              <a:t>Upload quotes and run adjudication only after the PR is fully approved.</a:t>
             </a:r>
           </a:p>
         </p:txBody>
@@ -4984,20 +5167,54 @@
                   <a:srgbClr val="FFFFFF"/>
                 </a:solidFill>
               </a:rPr>
-              <a:t>Task: Run Adjudication</a:t>
-            </a:r>
-          </a:p>
-        </p:txBody>
-      </p:sp>
-      <p:sp>
-        <p:nvSpPr>
-          <p:cNvPr id="4" name="Oval 3"/>
+              <a:t>Task: Collect &amp; Add Quotes</a:t>
+            </a:r>
+          </a:p>
+        </p:txBody>
+      </p:sp>
+      <p:sp>
+        <p:nvSpPr>
+          <p:cNvPr id="4" name="TextBox 3"/>
+          <p:cNvSpPr txBox="1"/>
+          <p:nvPr/>
+        </p:nvSpPr>
+        <p:spPr>
+          <a:xfrm>
+            <a:off x="502920" y="1188720"/>
+            <a:ext cx="11183112" cy="320040"/>
+          </a:xfrm>
+          <a:prstGeom prst="rect">
+            <a:avLst/>
+          </a:prstGeom>
+          <a:noFill/>
+        </p:spPr>
+        <p:txBody>
+          <a:bodyPr wrap="square">
+            <a:spAutoFit/>
+          </a:bodyPr>
+          <a:lstStyle/>
+          <a:p>
+            <a:pPr algn="l"/>
+            <a:r>
+              <a:rPr sz="1200" b="0" i="1">
+                <a:solidFill>
+                  <a:srgbClr val="555555"/>
+                </a:solidFill>
+              </a:rPr>
+              <a:t>Start collecting quotes externally while the PR is still in Incoming PRs. Upload them here after approval.</a:t>
+            </a:r>
+          </a:p>
+        </p:txBody>
+      </p:sp>
+      <p:sp>
+        <p:nvSpPr>
+          <p:cNvPr id="5" name="Oval 4"/>
           <p:cNvSpPr/>
           <p:nvPr/>
         </p:nvSpPr>
         <p:spPr>
           <a:xfrm>
-            <a:off x="502920" y="1243584"/>
+            <a:off x="502920" y="1591056"/>
             <a:ext cx="411480" cy="411480"/>
           </a:xfrm>
           <a:prstGeom prst="ellipse">
@@ -5042,13 +5259,13 @@
       </p:sp>
       <p:sp>
         <p:nvSpPr>
-          <p:cNvPr id="5" name="TextBox 4"/>
+          <p:cNvPr id="6" name="TextBox 5"/>
           <p:cNvSpPr txBox="1"/>
           <p:nvPr/>
         </p:nvSpPr>
         <p:spPr>
           <a:xfrm>
-            <a:off x="1033272" y="1188720"/>
+            <a:off x="1033272" y="1536192"/>
             <a:ext cx="10634472" cy="566928"/>
           </a:xfrm>
           <a:prstGeom prst="rect">
@@ -5069,20 +5286,20 @@
                   <a:srgbClr val="111111"/>
                 </a:solidFill>
               </a:rPr>
-              <a:t>Sidebar → Procurement → Adjudication.</a:t>
-            </a:r>
-          </a:p>
-        </p:txBody>
-      </p:sp>
-      <p:sp>
-        <p:nvSpPr>
-          <p:cNvPr id="6" name="Oval 5"/>
+              <a:t>Once a PR is approved, open it from Sidebar → Procurement → Approved Requisitions.</a:t>
+            </a:r>
+          </a:p>
+        </p:txBody>
+      </p:sp>
+      <p:sp>
+        <p:nvSpPr>
+          <p:cNvPr id="7" name="Oval 6"/>
           <p:cNvSpPr/>
           <p:nvPr/>
         </p:nvSpPr>
         <p:spPr>
           <a:xfrm>
-            <a:off x="502920" y="1810512"/>
+            <a:off x="502920" y="2157984"/>
             <a:ext cx="411480" cy="411480"/>
           </a:xfrm>
           <a:prstGeom prst="ellipse">
@@ -5127,13 +5344,13 @@
       </p:sp>
       <p:sp>
         <p:nvSpPr>
-          <p:cNvPr id="7" name="TextBox 6"/>
+          <p:cNvPr id="8" name="TextBox 7"/>
           <p:cNvSpPr txBox="1"/>
           <p:nvPr/>
         </p:nvSpPr>
         <p:spPr>
           <a:xfrm>
-            <a:off x="1033272" y="1755648"/>
+            <a:off x="1033272" y="2103120"/>
             <a:ext cx="10634472" cy="566928"/>
           </a:xfrm>
           <a:prstGeom prst="rect">
@@ -5154,20 +5371,20 @@
                   <a:srgbClr val="111111"/>
                 </a:solidFill>
               </a:rPr>
-              <a:t>Find the PR and open its adjudication view.</a:t>
-            </a:r>
-          </a:p>
-        </p:txBody>
-      </p:sp>
-      <p:sp>
-        <p:nvSpPr>
-          <p:cNvPr id="8" name="Oval 7"/>
+              <a:t>Scroll to the Quotes section. Click Add Quote.</a:t>
+            </a:r>
+          </a:p>
+        </p:txBody>
+      </p:sp>
+      <p:sp>
+        <p:nvSpPr>
+          <p:cNvPr id="9" name="Oval 8"/>
           <p:cNvSpPr/>
           <p:nvPr/>
         </p:nvSpPr>
         <p:spPr>
           <a:xfrm>
-            <a:off x="502920" y="2377440"/>
+            <a:off x="502920" y="2724912"/>
             <a:ext cx="411480" cy="411480"/>
           </a:xfrm>
           <a:prstGeom prst="ellipse">
@@ -5212,13 +5429,13 @@
       </p:sp>
       <p:sp>
         <p:nvSpPr>
-          <p:cNvPr id="9" name="TextBox 8"/>
+          <p:cNvPr id="10" name="TextBox 9"/>
           <p:cNvSpPr txBox="1"/>
           <p:nvPr/>
         </p:nvSpPr>
         <p:spPr>
           <a:xfrm>
-            <a:off x="1033272" y="2322576"/>
+            <a:off x="1033272" y="2670048"/>
             <a:ext cx="10634472" cy="566928"/>
           </a:xfrm>
           <a:prstGeom prst="rect">
@@ -5239,20 +5456,20 @@
                   <a:srgbClr val="111111"/>
                 </a:solidFill>
               </a:rPr>
-              <a:t>Compare the quotes: price, delivery time, quality/track record.</a:t>
-            </a:r>
-          </a:p>
-        </p:txBody>
-      </p:sp>
-      <p:sp>
-        <p:nvSpPr>
-          <p:cNvPr id="10" name="Oval 9"/>
+              <a:t>Select the Vendor from the master list (add them first via Administration → Vendors if new).</a:t>
+            </a:r>
+          </a:p>
+        </p:txBody>
+      </p:sp>
+      <p:sp>
+        <p:nvSpPr>
+          <p:cNvPr id="11" name="Oval 10"/>
           <p:cNvSpPr/>
           <p:nvPr/>
         </p:nvSpPr>
         <p:spPr>
           <a:xfrm>
-            <a:off x="502920" y="2944368"/>
+            <a:off x="502920" y="3291840"/>
             <a:ext cx="411480" cy="411480"/>
           </a:xfrm>
           <a:prstGeom prst="ellipse">
@@ -5297,13 +5514,13 @@
       </p:sp>
       <p:sp>
         <p:nvSpPr>
-          <p:cNvPr id="11" name="TextBox 10"/>
+          <p:cNvPr id="12" name="TextBox 11"/>
           <p:cNvSpPr txBox="1"/>
           <p:nvPr/>
         </p:nvSpPr>
         <p:spPr>
           <a:xfrm>
-            <a:off x="1033272" y="2889504"/>
+            <a:off x="1033272" y="3236976"/>
             <a:ext cx="10634472" cy="566928"/>
           </a:xfrm>
           <a:prstGeom prst="rect">
@@ -5324,20 +5541,20 @@
                   <a:srgbClr val="111111"/>
                 </a:solidFill>
               </a:rPr>
-              <a:t>Select the winning vendor and document the reasoning in the Adjudication Notes.</a:t>
-            </a:r>
-          </a:p>
-        </p:txBody>
-      </p:sp>
-      <p:sp>
-        <p:nvSpPr>
-          <p:cNvPr id="12" name="Oval 11"/>
+              <a:t>Enter unit price, currency, attach the quote PDF, enter validity period.</a:t>
+            </a:r>
+          </a:p>
+        </p:txBody>
+      </p:sp>
+      <p:sp>
+        <p:nvSpPr>
+          <p:cNvPr id="13" name="Oval 12"/>
           <p:cNvSpPr/>
           <p:nvPr/>
         </p:nvSpPr>
         <p:spPr>
           <a:xfrm>
-            <a:off x="502920" y="3511296"/>
+            <a:off x="502920" y="3858768"/>
             <a:ext cx="411480" cy="411480"/>
           </a:xfrm>
           <a:prstGeom prst="ellipse">
@@ -5382,13 +5599,13 @@
       </p:sp>
       <p:sp>
         <p:nvSpPr>
-          <p:cNvPr id="13" name="TextBox 12"/>
+          <p:cNvPr id="14" name="TextBox 13"/>
           <p:cNvSpPr txBox="1"/>
           <p:nvPr/>
         </p:nvSpPr>
         <p:spPr>
           <a:xfrm>
-            <a:off x="1033272" y="3456432"/>
+            <a:off x="1033272" y="3803904"/>
             <a:ext cx="10634472" cy="566928"/>
           </a:xfrm>
           <a:prstGeom prst="rect">
@@ -5409,20 +5626,20 @@
                   <a:srgbClr val="111111"/>
                 </a:solidFill>
               </a:rPr>
-              <a:t>Submit the adjudication — this records the decision in the audit trail.</a:t>
-            </a:r>
-          </a:p>
-        </p:txBody>
-      </p:sp>
-      <p:sp>
-        <p:nvSpPr>
-          <p:cNvPr id="14" name="Oval 13"/>
+              <a:t>Repeat for each supplier — aim for at least 3 quotes for items above the unquoted limit.</a:t>
+            </a:r>
+          </a:p>
+        </p:txBody>
+      </p:sp>
+      <p:sp>
+        <p:nvSpPr>
+          <p:cNvPr id="15" name="Oval 14"/>
           <p:cNvSpPr/>
           <p:nvPr/>
         </p:nvSpPr>
         <p:spPr>
           <a:xfrm>
-            <a:off x="502920" y="4078224"/>
+            <a:off x="502920" y="4425696"/>
             <a:ext cx="411480" cy="411480"/>
           </a:xfrm>
           <a:prstGeom prst="ellipse">
@@ -5467,13 +5684,13 @@
       </p:sp>
       <p:sp>
         <p:nvSpPr>
-          <p:cNvPr id="15" name="TextBox 14"/>
+          <p:cNvPr id="16" name="TextBox 15"/>
           <p:cNvSpPr txBox="1"/>
           <p:nvPr/>
         </p:nvSpPr>
         <p:spPr>
           <a:xfrm>
-            <a:off x="1033272" y="4023360"/>
+            <a:off x="1033272" y="4370832"/>
             <a:ext cx="10634472" cy="566928"/>
           </a:xfrm>
           <a:prstGeom prst="rect">
@@ -5494,7 +5711,7 @@
                   <a:srgbClr val="111111"/>
                 </a:solidFill>
               </a:rPr>
-              <a:t>Issue the Purchase Order to the winning vendor outside the system.</a:t>
+              <a:t>Once all quotes are in, proceed to adjudication.</a:t>
             </a:r>
           </a:p>
         </p:txBody>
@@ -5589,21 +5806,72 @@
                   <a:srgbClr val="FFFFFF"/>
                 </a:solidFill>
               </a:rPr>
-              <a:t>Vendor Management</a:t>
-            </a:r>
-          </a:p>
-        </p:txBody>
-      </p:sp>
-      <p:sp>
-        <p:nvSpPr>
-          <p:cNvPr id="4" name="TextBox 3"/>
+              <a:t>Task: Run Adjudication</a:t>
+            </a:r>
+          </a:p>
+        </p:txBody>
+      </p:sp>
+      <p:sp>
+        <p:nvSpPr>
+          <p:cNvPr id="4" name="Oval 3"/>
+          <p:cNvSpPr/>
+          <p:nvPr/>
+        </p:nvSpPr>
+        <p:spPr>
+          <a:xfrm>
+            <a:off x="502920" y="1243584"/>
+            <a:ext cx="411480" cy="411480"/>
+          </a:xfrm>
+          <a:prstGeom prst="ellipse">
+            <a:avLst/>
+          </a:prstGeom>
+          <a:solidFill>
+            <a:srgbClr val="0B4A8A"/>
+          </a:solidFill>
+          <a:ln>
+            <a:noFill/>
+          </a:ln>
+        </p:spPr>
+        <p:style>
+          <a:lnRef idx="1">
+            <a:schemeClr val="accent1"/>
+          </a:lnRef>
+          <a:fillRef idx="3">
+            <a:schemeClr val="accent1"/>
+          </a:fillRef>
+          <a:effectRef idx="2">
+            <a:schemeClr val="accent1"/>
+          </a:effectRef>
+          <a:fontRef idx="minor">
+            <a:schemeClr val="lt1"/>
+          </a:fontRef>
+        </p:style>
+        <p:txBody>
+          <a:bodyPr rtlCol="0" anchor="ctr"/>
+          <a:lstStyle/>
+          <a:p>
+            <a:pPr algn="ctr"/>
+            <a:r>
+              <a:rPr sz="1200" b="1">
+                <a:solidFill>
+                  <a:srgbClr val="FFFFFF"/>
+                </a:solidFill>
+              </a:rPr>
+              <a:t>1</a:t>
+            </a:r>
+          </a:p>
+        </p:txBody>
+      </p:sp>
+      <p:sp>
+        <p:nvSpPr>
+          <p:cNvPr id="5" name="TextBox 4"/>
           <p:cNvSpPr txBox="1"/>
           <p:nvPr/>
         </p:nvSpPr>
         <p:spPr>
           <a:xfrm>
-            <a:off x="502920" y="1188720"/>
-            <a:ext cx="11183112" cy="5440680"/>
+            <a:off x="1033272" y="1188720"/>
+            <a:ext cx="10634472" cy="566928"/>
           </a:xfrm>
           <a:prstGeom prst="rect">
             <a:avLst/>
@@ -5616,198 +5884,439 @@
           </a:bodyPr>
           <a:lstStyle/>
           <a:p>
-            <a:pPr>
-              <a:spcBef>
-                <a:spcPts val="300"/>
-              </a:spcBef>
-            </a:pPr>
-            <a:r>
-              <a:rPr sz="1300">
+            <a:pPr algn="l"/>
+            <a:r>
+              <a:rPr sz="1300" b="0" i="0">
                 <a:solidFill>
                   <a:srgbClr val="111111"/>
                 </a:solidFill>
               </a:rPr>
-              <a:t>Sidebar → Administration → Vendors</a:t>
-            </a:r>
-          </a:p>
-          <a:p>
-            <a:pPr>
-              <a:spcBef>
-                <a:spcPts val="600"/>
-              </a:spcBef>
-            </a:pPr>
-            <a:r>
-              <a:rPr sz="1400" b="1">
-                <a:solidFill>
-                  <a:srgbClr val="0B4A8A"/>
-                </a:solidFill>
-              </a:rPr>
-              <a:t>Adding a vendor:</a:t>
-            </a:r>
-          </a:p>
-          <a:p>
-            <a:pPr>
-              <a:spcBef>
-                <a:spcPts val="300"/>
-              </a:spcBef>
-            </a:pPr>
-            <a:r>
-              <a:rPr sz="1300">
+              <a:t>Sidebar → Procurement → Adjudication.</a:t>
+            </a:r>
+          </a:p>
+        </p:txBody>
+      </p:sp>
+      <p:sp>
+        <p:nvSpPr>
+          <p:cNvPr id="6" name="Oval 5"/>
+          <p:cNvSpPr/>
+          <p:nvPr/>
+        </p:nvSpPr>
+        <p:spPr>
+          <a:xfrm>
+            <a:off x="502920" y="1810512"/>
+            <a:ext cx="411480" cy="411480"/>
+          </a:xfrm>
+          <a:prstGeom prst="ellipse">
+            <a:avLst/>
+          </a:prstGeom>
+          <a:solidFill>
+            <a:srgbClr val="0B4A8A"/>
+          </a:solidFill>
+          <a:ln>
+            <a:noFill/>
+          </a:ln>
+        </p:spPr>
+        <p:style>
+          <a:lnRef idx="1">
+            <a:schemeClr val="accent1"/>
+          </a:lnRef>
+          <a:fillRef idx="3">
+            <a:schemeClr val="accent1"/>
+          </a:fillRef>
+          <a:effectRef idx="2">
+            <a:schemeClr val="accent1"/>
+          </a:effectRef>
+          <a:fontRef idx="minor">
+            <a:schemeClr val="lt1"/>
+          </a:fontRef>
+        </p:style>
+        <p:txBody>
+          <a:bodyPr rtlCol="0" anchor="ctr"/>
+          <a:lstStyle/>
+          <a:p>
+            <a:pPr algn="ctr"/>
+            <a:r>
+              <a:rPr sz="1200" b="1">
+                <a:solidFill>
+                  <a:srgbClr val="FFFFFF"/>
+                </a:solidFill>
+              </a:rPr>
+              <a:t>2</a:t>
+            </a:r>
+          </a:p>
+        </p:txBody>
+      </p:sp>
+      <p:sp>
+        <p:nvSpPr>
+          <p:cNvPr id="7" name="TextBox 6"/>
+          <p:cNvSpPr txBox="1"/>
+          <p:nvPr/>
+        </p:nvSpPr>
+        <p:spPr>
+          <a:xfrm>
+            <a:off x="1033272" y="1755648"/>
+            <a:ext cx="10634472" cy="566928"/>
+          </a:xfrm>
+          <a:prstGeom prst="rect">
+            <a:avLst/>
+          </a:prstGeom>
+          <a:noFill/>
+        </p:spPr>
+        <p:txBody>
+          <a:bodyPr wrap="square">
+            <a:spAutoFit/>
+          </a:bodyPr>
+          <a:lstStyle/>
+          <a:p>
+            <a:pPr algn="l"/>
+            <a:r>
+              <a:rPr sz="1300" b="0" i="0">
                 <a:solidFill>
                   <a:srgbClr val="111111"/>
                 </a:solidFill>
               </a:rPr>
-              <a:t>Click Add Vendor → fill name, code, category, contact, tier (1–3), rating (1–5)</a:t>
-            </a:r>
-          </a:p>
-          <a:p>
-            <a:pPr>
-              <a:spcBef>
-                <a:spcPts val="600"/>
-              </a:spcBef>
-            </a:pPr>
-            <a:r>
-              <a:rPr sz="1400" b="1">
-                <a:solidFill>
-                  <a:srgbClr val="0B4A8A"/>
-                </a:solidFill>
-              </a:rPr>
-              <a:t>Editing / deactivating:</a:t>
-            </a:r>
-          </a:p>
-          <a:p>
-            <a:pPr>
-              <a:spcBef>
-                <a:spcPts val="300"/>
-              </a:spcBef>
-            </a:pPr>
-            <a:r>
-              <a:rPr sz="1300">
+              <a:t>Find the PR and open its adjudication view.</a:t>
+            </a:r>
+          </a:p>
+        </p:txBody>
+      </p:sp>
+      <p:sp>
+        <p:nvSpPr>
+          <p:cNvPr id="8" name="Oval 7"/>
+          <p:cNvSpPr/>
+          <p:nvPr/>
+        </p:nvSpPr>
+        <p:spPr>
+          <a:xfrm>
+            <a:off x="502920" y="2377440"/>
+            <a:ext cx="411480" cy="411480"/>
+          </a:xfrm>
+          <a:prstGeom prst="ellipse">
+            <a:avLst/>
+          </a:prstGeom>
+          <a:solidFill>
+            <a:srgbClr val="0B4A8A"/>
+          </a:solidFill>
+          <a:ln>
+            <a:noFill/>
+          </a:ln>
+        </p:spPr>
+        <p:style>
+          <a:lnRef idx="1">
+            <a:schemeClr val="accent1"/>
+          </a:lnRef>
+          <a:fillRef idx="3">
+            <a:schemeClr val="accent1"/>
+          </a:fillRef>
+          <a:effectRef idx="2">
+            <a:schemeClr val="accent1"/>
+          </a:effectRef>
+          <a:fontRef idx="minor">
+            <a:schemeClr val="lt1"/>
+          </a:fontRef>
+        </p:style>
+        <p:txBody>
+          <a:bodyPr rtlCol="0" anchor="ctr"/>
+          <a:lstStyle/>
+          <a:p>
+            <a:pPr algn="ctr"/>
+            <a:r>
+              <a:rPr sz="1200" b="1">
+                <a:solidFill>
+                  <a:srgbClr val="FFFFFF"/>
+                </a:solidFill>
+              </a:rPr>
+              <a:t>3</a:t>
+            </a:r>
+          </a:p>
+        </p:txBody>
+      </p:sp>
+      <p:sp>
+        <p:nvSpPr>
+          <p:cNvPr id="9" name="TextBox 8"/>
+          <p:cNvSpPr txBox="1"/>
+          <p:nvPr/>
+        </p:nvSpPr>
+        <p:spPr>
+          <a:xfrm>
+            <a:off x="1033272" y="2322576"/>
+            <a:ext cx="10634472" cy="566928"/>
+          </a:xfrm>
+          <a:prstGeom prst="rect">
+            <a:avLst/>
+          </a:prstGeom>
+          <a:noFill/>
+        </p:spPr>
+        <p:txBody>
+          <a:bodyPr wrap="square">
+            <a:spAutoFit/>
+          </a:bodyPr>
+          <a:lstStyle/>
+          <a:p>
+            <a:pPr algn="l"/>
+            <a:r>
+              <a:rPr sz="1300" b="0" i="0">
                 <a:solidFill>
                   <a:srgbClr val="111111"/>
                 </a:solidFill>
               </a:rPr>
-              <a:t>Click the vendor row → update fields → Save</a:t>
-            </a:r>
-          </a:p>
-          <a:p>
-            <a:pPr>
-              <a:spcBef>
-                <a:spcPts val="300"/>
-              </a:spcBef>
-            </a:pPr>
-            <a:r>
-              <a:rPr sz="1300">
+              <a:t>Compare the quotes: price (all converted to ZMW), delivery time, quality/track record.</a:t>
+            </a:r>
+          </a:p>
+        </p:txBody>
+      </p:sp>
+      <p:sp>
+        <p:nvSpPr>
+          <p:cNvPr id="10" name="Oval 9"/>
+          <p:cNvSpPr/>
+          <p:nvPr/>
+        </p:nvSpPr>
+        <p:spPr>
+          <a:xfrm>
+            <a:off x="502920" y="2944368"/>
+            <a:ext cx="411480" cy="411480"/>
+          </a:xfrm>
+          <a:prstGeom prst="ellipse">
+            <a:avLst/>
+          </a:prstGeom>
+          <a:solidFill>
+            <a:srgbClr val="0B4A8A"/>
+          </a:solidFill>
+          <a:ln>
+            <a:noFill/>
+          </a:ln>
+        </p:spPr>
+        <p:style>
+          <a:lnRef idx="1">
+            <a:schemeClr val="accent1"/>
+          </a:lnRef>
+          <a:fillRef idx="3">
+            <a:schemeClr val="accent1"/>
+          </a:fillRef>
+          <a:effectRef idx="2">
+            <a:schemeClr val="accent1"/>
+          </a:effectRef>
+          <a:fontRef idx="minor">
+            <a:schemeClr val="lt1"/>
+          </a:fontRef>
+        </p:style>
+        <p:txBody>
+          <a:bodyPr rtlCol="0" anchor="ctr"/>
+          <a:lstStyle/>
+          <a:p>
+            <a:pPr algn="ctr"/>
+            <a:r>
+              <a:rPr sz="1200" b="1">
+                <a:solidFill>
+                  <a:srgbClr val="FFFFFF"/>
+                </a:solidFill>
+              </a:rPr>
+              <a:t>4</a:t>
+            </a:r>
+          </a:p>
+        </p:txBody>
+      </p:sp>
+      <p:sp>
+        <p:nvSpPr>
+          <p:cNvPr id="11" name="TextBox 10"/>
+          <p:cNvSpPr txBox="1"/>
+          <p:nvPr/>
+        </p:nvSpPr>
+        <p:spPr>
+          <a:xfrm>
+            <a:off x="1033272" y="2889504"/>
+            <a:ext cx="10634472" cy="566928"/>
+          </a:xfrm>
+          <a:prstGeom prst="rect">
+            <a:avLst/>
+          </a:prstGeom>
+          <a:noFill/>
+        </p:spPr>
+        <p:txBody>
+          <a:bodyPr wrap="square">
+            <a:spAutoFit/>
+          </a:bodyPr>
+          <a:lstStyle/>
+          <a:p>
+            <a:pPr algn="l"/>
+            <a:r>
+              <a:rPr sz="1300" b="0" i="0">
                 <a:solidFill>
                   <a:srgbClr val="111111"/>
                 </a:solidFill>
               </a:rPr>
-              <a:t>To deactivate: set Status to inactive — the vendor disappears from dropdowns but historical quotes remain</a:t>
-            </a:r>
-          </a:p>
-          <a:p>
-            <a:pPr>
-              <a:spcBef>
-                <a:spcPts val="600"/>
-              </a:spcBef>
-            </a:pPr>
-            <a:r>
-              <a:rPr sz="1400" b="1">
-                <a:solidFill>
-                  <a:srgbClr val="0B4A8A"/>
-                </a:solidFill>
-              </a:rPr>
-              <a:t>Bulk upload:</a:t>
-            </a:r>
-          </a:p>
-          <a:p>
-            <a:pPr>
-              <a:spcBef>
-                <a:spcPts val="300"/>
-              </a:spcBef>
-            </a:pPr>
-            <a:r>
-              <a:rPr sz="1300">
+              <a:t>Select the winning vendor and document the reasoning in the Adjudication Notes.</a:t>
+            </a:r>
+          </a:p>
+        </p:txBody>
+      </p:sp>
+      <p:sp>
+        <p:nvSpPr>
+          <p:cNvPr id="12" name="Oval 11"/>
+          <p:cNvSpPr/>
+          <p:nvPr/>
+        </p:nvSpPr>
+        <p:spPr>
+          <a:xfrm>
+            <a:off x="502920" y="3511296"/>
+            <a:ext cx="411480" cy="411480"/>
+          </a:xfrm>
+          <a:prstGeom prst="ellipse">
+            <a:avLst/>
+          </a:prstGeom>
+          <a:solidFill>
+            <a:srgbClr val="0B4A8A"/>
+          </a:solidFill>
+          <a:ln>
+            <a:noFill/>
+          </a:ln>
+        </p:spPr>
+        <p:style>
+          <a:lnRef idx="1">
+            <a:schemeClr val="accent1"/>
+          </a:lnRef>
+          <a:fillRef idx="3">
+            <a:schemeClr val="accent1"/>
+          </a:fillRef>
+          <a:effectRef idx="2">
+            <a:schemeClr val="accent1"/>
+          </a:effectRef>
+          <a:fontRef idx="minor">
+            <a:schemeClr val="lt1"/>
+          </a:fontRef>
+        </p:style>
+        <p:txBody>
+          <a:bodyPr rtlCol="0" anchor="ctr"/>
+          <a:lstStyle/>
+          <a:p>
+            <a:pPr algn="ctr"/>
+            <a:r>
+              <a:rPr sz="1200" b="1">
+                <a:solidFill>
+                  <a:srgbClr val="FFFFFF"/>
+                </a:solidFill>
+              </a:rPr>
+              <a:t>5</a:t>
+            </a:r>
+          </a:p>
+        </p:txBody>
+      </p:sp>
+      <p:sp>
+        <p:nvSpPr>
+          <p:cNvPr id="13" name="TextBox 12"/>
+          <p:cNvSpPr txBox="1"/>
+          <p:nvPr/>
+        </p:nvSpPr>
+        <p:spPr>
+          <a:xfrm>
+            <a:off x="1033272" y="3456432"/>
+            <a:ext cx="10634472" cy="566928"/>
+          </a:xfrm>
+          <a:prstGeom prst="rect">
+            <a:avLst/>
+          </a:prstGeom>
+          <a:noFill/>
+        </p:spPr>
+        <p:txBody>
+          <a:bodyPr wrap="square">
+            <a:spAutoFit/>
+          </a:bodyPr>
+          <a:lstStyle/>
+          <a:p>
+            <a:pPr algn="l"/>
+            <a:r>
+              <a:rPr sz="1300" b="0" i="0">
                 <a:solidFill>
                   <a:srgbClr val="111111"/>
                 </a:solidFill>
               </a:rPr>
-              <a:t>Download the vendor template → fill columns → click Upload from Excel</a:t>
-            </a:r>
-          </a:p>
-          <a:p>
-            <a:pPr>
-              <a:spcBef>
-                <a:spcPts val="600"/>
-              </a:spcBef>
-            </a:pPr>
-            <a:r>
-              <a:rPr sz="1400" b="1">
-                <a:solidFill>
-                  <a:srgbClr val="0B4A8A"/>
-                </a:solidFill>
-              </a:rPr>
-              <a:t>Vendor codes should be stable — do not change a code after it has been used on a quote.</a:t>
-            </a:r>
-          </a:p>
-          <a:p>
-            <a:pPr>
-              <a:spcBef>
-                <a:spcPts val="600"/>
-              </a:spcBef>
-            </a:pPr>
-            <a:r>
-              <a:rPr sz="1400" b="1">
-                <a:solidFill>
-                  <a:srgbClr val="0B4A8A"/>
-                </a:solidFill>
-              </a:rPr>
-              <a:t>Quote rules of thumb:</a:t>
-            </a:r>
-          </a:p>
-          <a:p>
-            <a:pPr>
-              <a:spcBef>
-                <a:spcPts val="300"/>
-              </a:spcBef>
-            </a:pPr>
-            <a:r>
-              <a:rPr sz="1300">
+              <a:t>Submit the adjudication — this records the decision in the audit trail.</a:t>
+            </a:r>
+          </a:p>
+        </p:txBody>
+      </p:sp>
+      <p:sp>
+        <p:nvSpPr>
+          <p:cNvPr id="14" name="Oval 13"/>
+          <p:cNvSpPr/>
+          <p:nvPr/>
+        </p:nvSpPr>
+        <p:spPr>
+          <a:xfrm>
+            <a:off x="502920" y="4078224"/>
+            <a:ext cx="411480" cy="411480"/>
+          </a:xfrm>
+          <a:prstGeom prst="ellipse">
+            <a:avLst/>
+          </a:prstGeom>
+          <a:solidFill>
+            <a:srgbClr val="0B4A8A"/>
+          </a:solidFill>
+          <a:ln>
+            <a:noFill/>
+          </a:ln>
+        </p:spPr>
+        <p:style>
+          <a:lnRef idx="1">
+            <a:schemeClr val="accent1"/>
+          </a:lnRef>
+          <a:fillRef idx="3">
+            <a:schemeClr val="accent1"/>
+          </a:fillRef>
+          <a:effectRef idx="2">
+            <a:schemeClr val="accent1"/>
+          </a:effectRef>
+          <a:fontRef idx="minor">
+            <a:schemeClr val="lt1"/>
+          </a:fontRef>
+        </p:style>
+        <p:txBody>
+          <a:bodyPr rtlCol="0" anchor="ctr"/>
+          <a:lstStyle/>
+          <a:p>
+            <a:pPr algn="ctr"/>
+            <a:r>
+              <a:rPr sz="1200" b="1">
+                <a:solidFill>
+                  <a:srgbClr val="FFFFFF"/>
+                </a:solidFill>
+              </a:rPr>
+              <a:t>6</a:t>
+            </a:r>
+          </a:p>
+        </p:txBody>
+      </p:sp>
+      <p:sp>
+        <p:nvSpPr>
+          <p:cNvPr id="15" name="TextBox 14"/>
+          <p:cNvSpPr txBox="1"/>
+          <p:nvPr/>
+        </p:nvSpPr>
+        <p:spPr>
+          <a:xfrm>
+            <a:off x="1033272" y="4023360"/>
+            <a:ext cx="10634472" cy="566928"/>
+          </a:xfrm>
+          <a:prstGeom prst="rect">
+            <a:avLst/>
+          </a:prstGeom>
+          <a:noFill/>
+        </p:spPr>
+        <p:txBody>
+          <a:bodyPr wrap="square">
+            <a:spAutoFit/>
+          </a:bodyPr>
+          <a:lstStyle/>
+          <a:p>
+            <a:pPr algn="l"/>
+            <a:r>
+              <a:rPr sz="1300" b="0" i="0">
                 <a:solidFill>
                   <a:srgbClr val="111111"/>
                 </a:solidFill>
               </a:rPr>
-              <a:t>Below the unquoted limit: no quote required, but adding one is always welcome</a:t>
-            </a:r>
-          </a:p>
-          <a:p>
-            <a:pPr>
-              <a:spcBef>
-                <a:spcPts val="300"/>
-              </a:spcBef>
-            </a:pPr>
-            <a:r>
-              <a:rPr sz="1300">
-                <a:solidFill>
-                  <a:srgbClr val="111111"/>
-                </a:solidFill>
-              </a:rPr>
-              <a:t>Above the limit: at least 3 written quotes required</a:t>
-            </a:r>
-          </a:p>
-          <a:p>
-            <a:pPr>
-              <a:spcBef>
-                <a:spcPts val="300"/>
-              </a:spcBef>
-            </a:pPr>
-            <a:r>
-              <a:rPr sz="1300">
-                <a:solidFill>
-                  <a:srgbClr val="111111"/>
-                </a:solidFill>
-              </a:rPr>
-              <a:t>Sole-source: attach a written HOD/Finance justification</a:t>
+              <a:t>Issue the Purchase Order to the winning vendor outside the system.</a:t>
             </a:r>
           </a:p>
         </p:txBody>
@@ -5821,6 +6330,304 @@
 </file>
 
 <file path=ppt/slides/slide7.xml><?xml version="1.0" encoding="utf-8"?>
+<p:sld xmlns:a="http://schemas.openxmlformats.org/drawingml/2006/main" xmlns:p="http://schemas.openxmlformats.org/presentationml/2006/main" xmlns:r="http://schemas.openxmlformats.org/officeDocument/2006/relationships">
+  <p:cSld>
+    <p:spTree>
+      <p:nvGrpSpPr>
+        <p:cNvPr id="1" name=""/>
+        <p:cNvGrpSpPr/>
+        <p:nvPr/>
+      </p:nvGrpSpPr>
+      <p:grpSpPr/>
+      <p:sp>
+        <p:nvSpPr>
+          <p:cNvPr id="2" name="Rectangle 1"/>
+          <p:cNvSpPr/>
+          <p:nvPr/>
+        </p:nvSpPr>
+        <p:spPr>
+          <a:xfrm>
+            <a:off x="0" y="0"/>
+            <a:ext cx="12188952" cy="1051560"/>
+          </a:xfrm>
+          <a:prstGeom prst="rect">
+            <a:avLst/>
+          </a:prstGeom>
+          <a:solidFill>
+            <a:srgbClr val="0B4A8A"/>
+          </a:solidFill>
+          <a:ln>
+            <a:noFill/>
+          </a:ln>
+        </p:spPr>
+        <p:style>
+          <a:lnRef idx="1">
+            <a:schemeClr val="accent1"/>
+          </a:lnRef>
+          <a:fillRef idx="3">
+            <a:schemeClr val="accent1"/>
+          </a:fillRef>
+          <a:effectRef idx="2">
+            <a:schemeClr val="accent1"/>
+          </a:effectRef>
+          <a:fontRef idx="minor">
+            <a:schemeClr val="lt1"/>
+          </a:fontRef>
+        </p:style>
+        <p:txBody>
+          <a:bodyPr rtlCol="0" anchor="ctr"/>
+          <a:lstStyle/>
+          <a:p>
+            <a:pPr algn="ctr"/>
+          </a:p>
+        </p:txBody>
+      </p:sp>
+      <p:sp>
+        <p:nvSpPr>
+          <p:cNvPr id="3" name="TextBox 2"/>
+          <p:cNvSpPr txBox="1"/>
+          <p:nvPr/>
+        </p:nvSpPr>
+        <p:spPr>
+          <a:xfrm>
+            <a:off x="502920" y="274320"/>
+            <a:ext cx="11183112" cy="685800"/>
+          </a:xfrm>
+          <a:prstGeom prst="rect">
+            <a:avLst/>
+          </a:prstGeom>
+          <a:noFill/>
+        </p:spPr>
+        <p:txBody>
+          <a:bodyPr wrap="square">
+            <a:spAutoFit/>
+          </a:bodyPr>
+          <a:lstStyle/>
+          <a:p>
+            <a:pPr algn="l"/>
+            <a:r>
+              <a:rPr sz="2200" b="1" i="0">
+                <a:solidFill>
+                  <a:srgbClr val="FFFFFF"/>
+                </a:solidFill>
+              </a:rPr>
+              <a:t>Vendor Management</a:t>
+            </a:r>
+          </a:p>
+        </p:txBody>
+      </p:sp>
+      <p:sp>
+        <p:nvSpPr>
+          <p:cNvPr id="4" name="TextBox 3"/>
+          <p:cNvSpPr txBox="1"/>
+          <p:nvPr/>
+        </p:nvSpPr>
+        <p:spPr>
+          <a:xfrm>
+            <a:off x="502920" y="1188720"/>
+            <a:ext cx="11183112" cy="5440680"/>
+          </a:xfrm>
+          <a:prstGeom prst="rect">
+            <a:avLst/>
+          </a:prstGeom>
+          <a:noFill/>
+        </p:spPr>
+        <p:txBody>
+          <a:bodyPr wrap="square">
+            <a:spAutoFit/>
+          </a:bodyPr>
+          <a:lstStyle/>
+          <a:p>
+            <a:pPr>
+              <a:spcBef>
+                <a:spcPts val="300"/>
+              </a:spcBef>
+            </a:pPr>
+            <a:r>
+              <a:rPr sz="1300">
+                <a:solidFill>
+                  <a:srgbClr val="111111"/>
+                </a:solidFill>
+              </a:rPr>
+              <a:t>Sidebar → Administration → Vendors</a:t>
+            </a:r>
+          </a:p>
+          <a:p>
+            <a:pPr>
+              <a:spcBef>
+                <a:spcPts val="600"/>
+              </a:spcBef>
+            </a:pPr>
+            <a:r>
+              <a:rPr sz="1400" b="1">
+                <a:solidFill>
+                  <a:srgbClr val="0B4A8A"/>
+                </a:solidFill>
+              </a:rPr>
+              <a:t>Adding a vendor:</a:t>
+            </a:r>
+          </a:p>
+          <a:p>
+            <a:pPr>
+              <a:spcBef>
+                <a:spcPts val="300"/>
+              </a:spcBef>
+            </a:pPr>
+            <a:r>
+              <a:rPr sz="1300">
+                <a:solidFill>
+                  <a:srgbClr val="111111"/>
+                </a:solidFill>
+              </a:rPr>
+              <a:t>Click Add Vendor → fill name, code, category, contact, tier (1–3), rating (1–5)</a:t>
+            </a:r>
+          </a:p>
+          <a:p>
+            <a:pPr>
+              <a:spcBef>
+                <a:spcPts val="600"/>
+              </a:spcBef>
+            </a:pPr>
+            <a:r>
+              <a:rPr sz="1400" b="1">
+                <a:solidFill>
+                  <a:srgbClr val="0B4A8A"/>
+                </a:solidFill>
+              </a:rPr>
+              <a:t>Editing / deactivating:</a:t>
+            </a:r>
+          </a:p>
+          <a:p>
+            <a:pPr>
+              <a:spcBef>
+                <a:spcPts val="300"/>
+              </a:spcBef>
+            </a:pPr>
+            <a:r>
+              <a:rPr sz="1300">
+                <a:solidFill>
+                  <a:srgbClr val="111111"/>
+                </a:solidFill>
+              </a:rPr>
+              <a:t>Click the vendor row → update fields → Save</a:t>
+            </a:r>
+          </a:p>
+          <a:p>
+            <a:pPr>
+              <a:spcBef>
+                <a:spcPts val="300"/>
+              </a:spcBef>
+            </a:pPr>
+            <a:r>
+              <a:rPr sz="1300">
+                <a:solidFill>
+                  <a:srgbClr val="111111"/>
+                </a:solidFill>
+              </a:rPr>
+              <a:t>To deactivate: set Status to inactive — vendor disappears from dropdowns but historical quotes remain</a:t>
+            </a:r>
+          </a:p>
+          <a:p>
+            <a:pPr>
+              <a:spcBef>
+                <a:spcPts val="600"/>
+              </a:spcBef>
+            </a:pPr>
+            <a:r>
+              <a:rPr sz="1400" b="1">
+                <a:solidFill>
+                  <a:srgbClr val="0B4A8A"/>
+                </a:solidFill>
+              </a:rPr>
+              <a:t>Bulk upload:</a:t>
+            </a:r>
+          </a:p>
+          <a:p>
+            <a:pPr>
+              <a:spcBef>
+                <a:spcPts val="300"/>
+              </a:spcBef>
+            </a:pPr>
+            <a:r>
+              <a:rPr sz="1300">
+                <a:solidFill>
+                  <a:srgbClr val="111111"/>
+                </a:solidFill>
+              </a:rPr>
+              <a:t>Download the vendor template → fill columns → click Upload from Excel</a:t>
+            </a:r>
+          </a:p>
+          <a:p>
+            <a:pPr>
+              <a:spcBef>
+                <a:spcPts val="600"/>
+              </a:spcBef>
+            </a:pPr>
+            <a:r>
+              <a:rPr sz="1400" b="1">
+                <a:solidFill>
+                  <a:srgbClr val="0B4A8A"/>
+                </a:solidFill>
+              </a:rPr>
+              <a:t>Quote rules of thumb:</a:t>
+            </a:r>
+          </a:p>
+          <a:p>
+            <a:pPr>
+              <a:spcBef>
+                <a:spcPts val="300"/>
+              </a:spcBef>
+            </a:pPr>
+            <a:r>
+              <a:rPr sz="1300">
+                <a:solidFill>
+                  <a:srgbClr val="111111"/>
+                </a:solidFill>
+              </a:rPr>
+              <a:t>Below the unquoted limit: no quote required, but adding one is always welcome</a:t>
+            </a:r>
+          </a:p>
+          <a:p>
+            <a:pPr>
+              <a:spcBef>
+                <a:spcPts val="300"/>
+              </a:spcBef>
+            </a:pPr>
+            <a:r>
+              <a:rPr sz="1300">
+                <a:solidFill>
+                  <a:srgbClr val="111111"/>
+                </a:solidFill>
+              </a:rPr>
+              <a:t>Above the limit: at least 3 written quotes required</a:t>
+            </a:r>
+          </a:p>
+          <a:p>
+            <a:pPr>
+              <a:spcBef>
+                <a:spcPts val="300"/>
+              </a:spcBef>
+            </a:pPr>
+            <a:r>
+              <a:rPr sz="1300">
+                <a:solidFill>
+                  <a:srgbClr val="111111"/>
+                </a:solidFill>
+              </a:rPr>
+              <a:t>Sole-source: attach a written HOD/Finance justification</a:t>
+            </a:r>
+          </a:p>
+        </p:txBody>
+      </p:sp>
+    </p:spTree>
+  </p:cSld>
+  <p:clrMapOvr>
+    <a:masterClrMapping/>
+  </p:clrMapOvr>
+</p:sld>
+</file>
+
+<file path=ppt/slides/slide8.xml><?xml version="1.0" encoding="utf-8"?>
 <p:sld xmlns:a="http://schemas.openxmlformats.org/drawingml/2006/main" xmlns:p="http://schemas.openxmlformats.org/presentationml/2006/main" xmlns:r="http://schemas.openxmlformats.org/officeDocument/2006/relationships">
   <p:cSld>
     <p:spTree>
